--- a/highlight/data/highlight_template.pptx
+++ b/highlight/data/highlight_template.pptx
@@ -1938,7 +1938,11 @@
             <p:ph type="title"/>
           </p:nvPr>
         </p:nvSpPr>
-        <p:spPr/>
+        <p:spPr>
+          <a:ln>
+            <a:noFill/>
+          </a:ln>
+        </p:spPr>
         <p:txBody>
           <a:bodyPr/>
           <a:lstStyle/>
@@ -1963,7 +1967,11 @@
             <p:ph type="pic" sz="quarter" idx="13"/>
           </p:nvPr>
         </p:nvSpPr>
-        <p:spPr/>
+        <p:spPr>
+          <a:ln>
+            <a:noFill/>
+          </a:ln>
+        </p:spPr>
         <p:txBody>
           <a:bodyPr/>
           <a:lstStyle/>
@@ -2145,7 +2153,11 @@
             <p:ph type="body" sz="quarter" idx="19"/>
           </p:nvPr>
         </p:nvSpPr>
-        <p:spPr/>
+        <p:spPr>
+          <a:ln>
+            <a:noFill/>
+          </a:ln>
+        </p:spPr>
         <p:txBody>
           <a:bodyPr/>
           <a:lstStyle/>
@@ -2175,6 +2187,9 @@
             <a:off x="228600" y="2530476"/>
             <a:ext cx="5638800" cy="1630361"/>
           </a:xfrm>
+          <a:ln>
+            <a:noFill/>
+          </a:ln>
         </p:spPr>
         <p:txBody>
           <a:bodyPr/>
@@ -2205,6 +2220,9 @@
             <a:off x="228600" y="4874130"/>
             <a:ext cx="5638800" cy="1630361"/>
           </a:xfrm>
+          <a:ln>
+            <a:noFill/>
+          </a:ln>
         </p:spPr>
         <p:txBody>
           <a:bodyPr/>
